--- a/EMI Calculator User Guide [15.Oct.2026].pptx
+++ b/EMI Calculator User Guide [15.Oct.2026].pptx
@@ -126,12 +126,12 @@
   <p:extLst>
     <p:ext uri="{521415D9-36F7-43E2-AB2F-B90AF26B5E84}">
       <p14:sectionLst xmlns:p14="http://schemas.microsoft.com/office/powerpoint/2010/main">
-        <p14:section name="Introduction" id="{abfe7adf-e9df-c8a8-923f-ca8cbdd63435}">
+        <p14:section name="Introduction" id="{9a8e29c3-b0a6-2f0c-5496-6ea487ab71db}">
           <p14:sldIdLst>
             <p14:sldId id="256"/>
           </p14:sldIdLst>
         </p14:section>
-        <p14:section name="The app" id="{4c48d25a-4b38-b16f-78fe-6aefd0a6c30a}">
+        <p14:section name="The app" id="{9c68e389-d3e0-c46f-62ed-128e8947a722}">
           <p14:sldIdLst>
             <p14:sldId id="257"/>
             <p14:sldId id="258"/>
@@ -147,7 +147,7 @@
             <p14:sldId id="268"/>
           </p14:sldIdLst>
         </p14:section>
-        <p14:section name="Testing and quality" id="{a014e3bb-d1b4-f469-6ac4-83db9d4f968a}">
+        <p14:section name="Testing and quality" id="{ef7af54e-4b34-6499-2882-ef989298e882}">
           <p14:sldIdLst>
             <p14:sldId id="269"/>
             <p14:sldId id="270"/>
@@ -1002,7 +1002,7 @@
           <a:p>
             <a:r>
               <a:rPr lang="en-US" dirty="0"/>
-              <a:t>Real output from the project. Red lines are intentional: test:gap documents JSONPlaceholder returning 201 for invalid input, and test:broken shows the five deliberately broken locators.</a:t>
+              <a:t>Real output from the project. Everything is green: test:deviations records JSONPlaceholder returning 201 for invalid input and 500 for malformed JSON, and test:self-healing confirms the five deliberately broken locators are detected as broken.</a:t>
             </a:r>
             <a:endParaRPr lang="en-US" dirty="0"/>
           </a:p>
@@ -3389,7 +3389,7 @@
                   <a:schemeClr val="accent5"/>
                 </a:solidFill>
               </a:rPr>
-              <a:t>Dashboard, report, compare and eligibility tools, with 194 automated test scenarios behind them.</a:t>
+              <a:t>Dashboard, report, compare and eligibility tools, with 207 automated test scenarios behind them, none failing.</a:t>
             </a:r>
             <a:endParaRPr lang="en-US" sz="1800" dirty="0"/>
           </a:p>
@@ -5114,7 +5114,7 @@
                   <a:schemeClr val="accent5"/>
                 </a:solidFill>
               </a:rPr>
-              <a:t>194 scenarios pass. The 8 that fail do so on purpose: documented API gaps and the broken-locator demo.</a:t>
+              <a:t>207 scenarios pass and none fail. That includes documented API deviations and detection of the broken locators.</a:t>
             </a:r>
             <a:endParaRPr lang="en-US" sz="1400" dirty="0"/>
           </a:p>
@@ -5730,7 +5730,7 @@
                   <a:schemeClr val="tx1"/>
                 </a:solidFill>
               </a:rPr>
-              <a:t>Top: 24 strict scenarios pass against a validating API. Bottom: 7 checks fail by design against the real service.</a:t>
+              <a:t>Top: 24 strict scenarios pass against a validating API. Bottom: 7 scenarios record how the real service departs from the brief, and pass.</a:t>
             </a:r>
             <a:endParaRPr lang="en-US" sz="1400" dirty="0"/>
           </a:p>
@@ -5853,8 +5853,8 @@
         </p:blipFill>
         <p:spPr>
           <a:xfrm>
-            <a:off x="1170645" y="1783080"/>
-            <a:ext cx="6491815" cy="1352461"/>
+            <a:off x="704088" y="2174748"/>
+            <a:ext cx="7424928" cy="1546860"/>
           </a:xfrm>
           <a:prstGeom prst="rect">
             <a:avLst/>
@@ -5863,7 +5863,7 @@
       </p:pic>
       <p:pic>
         <p:nvPicPr>
-          <p:cNvPr id="10" name="Screenshot 2" descr="Report of the known-gap suite: 0 of 7 passed, failing by design">    </p:cNvPr>
+          <p:cNvPr id="10" name="Screenshot 2" descr="Report of the known-deviations suite: 7 of 7 passed">    </p:cNvPr>
           <p:cNvPicPr>
             <a:picLocks noChangeAspect="1"/>
           </p:cNvPicPr>
@@ -5877,8 +5877,8 @@
         </p:blipFill>
         <p:spPr>
           <a:xfrm>
-            <a:off x="1170645" y="3226981"/>
-            <a:ext cx="6491815" cy="2524595"/>
+            <a:off x="704088" y="3813048"/>
+            <a:ext cx="7424928" cy="1546860"/>
           </a:xfrm>
           <a:prstGeom prst="rect">
             <a:avLst/>
@@ -6837,7 +6837,7 @@
                   <a:schemeClr val="tx1"/>
                 </a:solidFill>
               </a:rPr>
-              <a:t>Five locators are deliberately broken. npm run heal finds candidates and validates each one in a real browser.</a:t>
+              <a:t>Five locators are deliberately broken and tests confirm it. npm run heal then validates replacements in a real browser.</a:t>
             </a:r>
             <a:endParaRPr lang="en-US" sz="1400" dirty="0"/>
           </a:p>
